--- a/testcases/shapes-3d.pptx
+++ b/testcases/shapes-3d.pptx
@@ -6,6 +6,7 @@
   </p:sldMasterIdLst>
   <p:sldIdLst>
     <p:sldId id="256" r:id="rId2"/>
+    <p:sldId id="257" r:id="rId3"/>
   </p:sldIdLst>
   <p:sldSz cx="12192000" cy="6858000"/>
   <p:notesSz cx="6858000" cy="9144000"/>
@@ -129,7 +130,7 @@
           <p:cNvPr id="2" name="标题 1">
             <a:extLst>
               <a:ext uri="{FF2B5EF4-FFF2-40B4-BE49-F238E27FC236}">
-                <a16:creationId xmlns:a16="http://schemas.microsoft.com/office/drawing/2014/main" id="{8FAB38DE-7DA9-0EC9-1F56-B4535E6F2989}"/>
+                <a16:creationId xmlns:a16="http://schemas.microsoft.com/office/drawing/2014/main" id="{7D1DF59A-F698-49CB-3010-07835CF34041}"/>
               </a:ext>
             </a:extLst>
           </p:cNvPr>
@@ -166,7 +167,7 @@
           <p:cNvPr id="3" name="副标题 2">
             <a:extLst>
               <a:ext uri="{FF2B5EF4-FFF2-40B4-BE49-F238E27FC236}">
-                <a16:creationId xmlns:a16="http://schemas.microsoft.com/office/drawing/2014/main" id="{9A4D5AD1-8164-6A06-A0D8-B8D616888509}"/>
+                <a16:creationId xmlns:a16="http://schemas.microsoft.com/office/drawing/2014/main" id="{E2C0FCB7-34BC-92D8-7CF1-F0676AF6630B}"/>
               </a:ext>
             </a:extLst>
           </p:cNvPr>
@@ -236,7 +237,7 @@
           <p:cNvPr id="4" name="日期占位符 3">
             <a:extLst>
               <a:ext uri="{FF2B5EF4-FFF2-40B4-BE49-F238E27FC236}">
-                <a16:creationId xmlns:a16="http://schemas.microsoft.com/office/drawing/2014/main" id="{3373DEE5-5E1E-43FC-7297-3FE1B4C550BF}"/>
+                <a16:creationId xmlns:a16="http://schemas.microsoft.com/office/drawing/2014/main" id="{3FB15BDD-8ECC-9FD8-D198-9CF567261A7A}"/>
               </a:ext>
             </a:extLst>
           </p:cNvPr>
@@ -252,7 +253,7 @@
           <a:bodyPr/>
           <a:lstStyle/>
           <a:p>
-            <a:fld id="{00757A7C-17FE-42DB-BA1E-6E3DF2AE92B7}" type="datetimeFigureOut">
+            <a:fld id="{9A54E586-D7B1-4A7F-949B-0F458C3FAFDF}" type="datetimeFigureOut">
               <a:rPr lang="zh-CN" altLang="en-US" smtClean="0"/>
               <a:t>2026/10/13</a:t>
             </a:fld>
@@ -265,7 +266,7 @@
           <p:cNvPr id="5" name="页脚占位符 4">
             <a:extLst>
               <a:ext uri="{FF2B5EF4-FFF2-40B4-BE49-F238E27FC236}">
-                <a16:creationId xmlns:a16="http://schemas.microsoft.com/office/drawing/2014/main" id="{AC0D421C-8893-F662-C1E6-C8F35D62FC84}"/>
+                <a16:creationId xmlns:a16="http://schemas.microsoft.com/office/drawing/2014/main" id="{3762D6A9-549B-2C26-7C6D-1342C606C55A}"/>
               </a:ext>
             </a:extLst>
           </p:cNvPr>
@@ -290,7 +291,7 @@
           <p:cNvPr id="6" name="灯片编号占位符 5">
             <a:extLst>
               <a:ext uri="{FF2B5EF4-FFF2-40B4-BE49-F238E27FC236}">
-                <a16:creationId xmlns:a16="http://schemas.microsoft.com/office/drawing/2014/main" id="{7DD57AD3-952A-4EDC-1F6E-AD0F80C777A3}"/>
+                <a16:creationId xmlns:a16="http://schemas.microsoft.com/office/drawing/2014/main" id="{6449ACF3-4533-5C96-06DB-C3479D11C0DA}"/>
               </a:ext>
             </a:extLst>
           </p:cNvPr>
@@ -306,7 +307,7 @@
           <a:bodyPr/>
           <a:lstStyle/>
           <a:p>
-            <a:fld id="{D995F71A-2D9B-4CF0-ABE3-ED1EFFEA286C}" type="slidenum">
+            <a:fld id="{52A29C07-568E-49A1-AC9F-C6570502985A}" type="slidenum">
               <a:rPr lang="zh-CN" altLang="en-US" smtClean="0"/>
               <a:t>‹#›</a:t>
             </a:fld>
@@ -317,7 +318,7 @@
     </p:spTree>
     <p:extLst>
       <p:ext uri="{BB962C8B-B14F-4D97-AF65-F5344CB8AC3E}">
-        <p14:creationId xmlns:p14="http://schemas.microsoft.com/office/powerpoint/2010/main" val="2161649261"/>
+        <p14:creationId xmlns:p14="http://schemas.microsoft.com/office/powerpoint/2010/main" val="465997327"/>
       </p:ext>
     </p:extLst>
   </p:cSld>
@@ -349,7 +350,7 @@
           <p:cNvPr id="2" name="标题 1">
             <a:extLst>
               <a:ext uri="{FF2B5EF4-FFF2-40B4-BE49-F238E27FC236}">
-                <a16:creationId xmlns:a16="http://schemas.microsoft.com/office/drawing/2014/main" id="{581E8C7B-C918-9B38-2967-C7E5F03856DC}"/>
+                <a16:creationId xmlns:a16="http://schemas.microsoft.com/office/drawing/2014/main" id="{E9AC75A8-18BA-83D1-4E92-14C1A5AB0A5C}"/>
               </a:ext>
             </a:extLst>
           </p:cNvPr>
@@ -377,7 +378,7 @@
           <p:cNvPr id="3" name="竖排文字占位符 2">
             <a:extLst>
               <a:ext uri="{FF2B5EF4-FFF2-40B4-BE49-F238E27FC236}">
-                <a16:creationId xmlns:a16="http://schemas.microsoft.com/office/drawing/2014/main" id="{067BEEDB-E921-561E-0E33-233CE46F27EE}"/>
+                <a16:creationId xmlns:a16="http://schemas.microsoft.com/office/drawing/2014/main" id="{C0D48CDA-491A-79FD-2F8C-2C71DD3AA6D5}"/>
               </a:ext>
             </a:extLst>
           </p:cNvPr>
@@ -434,7 +435,7 @@
           <p:cNvPr id="4" name="日期占位符 3">
             <a:extLst>
               <a:ext uri="{FF2B5EF4-FFF2-40B4-BE49-F238E27FC236}">
-                <a16:creationId xmlns:a16="http://schemas.microsoft.com/office/drawing/2014/main" id="{8884B455-E6EA-87F1-C2F1-C0D9FC2E9022}"/>
+                <a16:creationId xmlns:a16="http://schemas.microsoft.com/office/drawing/2014/main" id="{4787935C-8F16-AEE5-A948-447BBFD00DD5}"/>
               </a:ext>
             </a:extLst>
           </p:cNvPr>
@@ -450,7 +451,7 @@
           <a:bodyPr/>
           <a:lstStyle/>
           <a:p>
-            <a:fld id="{00757A7C-17FE-42DB-BA1E-6E3DF2AE92B7}" type="datetimeFigureOut">
+            <a:fld id="{9A54E586-D7B1-4A7F-949B-0F458C3FAFDF}" type="datetimeFigureOut">
               <a:rPr lang="zh-CN" altLang="en-US" smtClean="0"/>
               <a:t>2026/10/13</a:t>
             </a:fld>
@@ -463,7 +464,7 @@
           <p:cNvPr id="5" name="页脚占位符 4">
             <a:extLst>
               <a:ext uri="{FF2B5EF4-FFF2-40B4-BE49-F238E27FC236}">
-                <a16:creationId xmlns:a16="http://schemas.microsoft.com/office/drawing/2014/main" id="{B090F489-98F9-412F-F53C-A732FA3BA68B}"/>
+                <a16:creationId xmlns:a16="http://schemas.microsoft.com/office/drawing/2014/main" id="{716B8228-4088-3306-ED69-F19810D61FAF}"/>
               </a:ext>
             </a:extLst>
           </p:cNvPr>
@@ -488,7 +489,7 @@
           <p:cNvPr id="6" name="灯片编号占位符 5">
             <a:extLst>
               <a:ext uri="{FF2B5EF4-FFF2-40B4-BE49-F238E27FC236}">
-                <a16:creationId xmlns:a16="http://schemas.microsoft.com/office/drawing/2014/main" id="{9889B137-C921-DF0C-338B-43F397565704}"/>
+                <a16:creationId xmlns:a16="http://schemas.microsoft.com/office/drawing/2014/main" id="{180153EC-309D-8AE8-6705-29CFB09F64E2}"/>
               </a:ext>
             </a:extLst>
           </p:cNvPr>
@@ -504,7 +505,7 @@
           <a:bodyPr/>
           <a:lstStyle/>
           <a:p>
-            <a:fld id="{D995F71A-2D9B-4CF0-ABE3-ED1EFFEA286C}" type="slidenum">
+            <a:fld id="{52A29C07-568E-49A1-AC9F-C6570502985A}" type="slidenum">
               <a:rPr lang="zh-CN" altLang="en-US" smtClean="0"/>
               <a:t>‹#›</a:t>
             </a:fld>
@@ -515,7 +516,7 @@
     </p:spTree>
     <p:extLst>
       <p:ext uri="{BB962C8B-B14F-4D97-AF65-F5344CB8AC3E}">
-        <p14:creationId xmlns:p14="http://schemas.microsoft.com/office/powerpoint/2010/main" val="3158467946"/>
+        <p14:creationId xmlns:p14="http://schemas.microsoft.com/office/powerpoint/2010/main" val="988244336"/>
       </p:ext>
     </p:extLst>
   </p:cSld>
@@ -547,7 +548,7 @@
           <p:cNvPr id="2" name="竖排标题 1">
             <a:extLst>
               <a:ext uri="{FF2B5EF4-FFF2-40B4-BE49-F238E27FC236}">
-                <a16:creationId xmlns:a16="http://schemas.microsoft.com/office/drawing/2014/main" id="{C4A492D1-ED81-E8D8-080B-F231397AB2AF}"/>
+                <a16:creationId xmlns:a16="http://schemas.microsoft.com/office/drawing/2014/main" id="{B0E060AB-D519-C3F3-76EE-D9DAD85BF788}"/>
               </a:ext>
             </a:extLst>
           </p:cNvPr>
@@ -580,7 +581,7 @@
           <p:cNvPr id="3" name="竖排文字占位符 2">
             <a:extLst>
               <a:ext uri="{FF2B5EF4-FFF2-40B4-BE49-F238E27FC236}">
-                <a16:creationId xmlns:a16="http://schemas.microsoft.com/office/drawing/2014/main" id="{897DC75A-6D1E-4F74-B88A-CACBBC7AB36F}"/>
+                <a16:creationId xmlns:a16="http://schemas.microsoft.com/office/drawing/2014/main" id="{3F8F591B-E8F4-AB99-3F3D-BEA72B4C5A12}"/>
               </a:ext>
             </a:extLst>
           </p:cNvPr>
@@ -642,7 +643,7 @@
           <p:cNvPr id="4" name="日期占位符 3">
             <a:extLst>
               <a:ext uri="{FF2B5EF4-FFF2-40B4-BE49-F238E27FC236}">
-                <a16:creationId xmlns:a16="http://schemas.microsoft.com/office/drawing/2014/main" id="{36EA65FF-45A9-0B0C-70C8-03E79C85629B}"/>
+                <a16:creationId xmlns:a16="http://schemas.microsoft.com/office/drawing/2014/main" id="{2A5F34B7-C0E4-2427-DB21-348ABC3D690F}"/>
               </a:ext>
             </a:extLst>
           </p:cNvPr>
@@ -658,7 +659,7 @@
           <a:bodyPr/>
           <a:lstStyle/>
           <a:p>
-            <a:fld id="{00757A7C-17FE-42DB-BA1E-6E3DF2AE92B7}" type="datetimeFigureOut">
+            <a:fld id="{9A54E586-D7B1-4A7F-949B-0F458C3FAFDF}" type="datetimeFigureOut">
               <a:rPr lang="zh-CN" altLang="en-US" smtClean="0"/>
               <a:t>2026/10/13</a:t>
             </a:fld>
@@ -671,7 +672,7 @@
           <p:cNvPr id="5" name="页脚占位符 4">
             <a:extLst>
               <a:ext uri="{FF2B5EF4-FFF2-40B4-BE49-F238E27FC236}">
-                <a16:creationId xmlns:a16="http://schemas.microsoft.com/office/drawing/2014/main" id="{D266A4D1-CD85-6DFF-2E0D-5B36400D83DE}"/>
+                <a16:creationId xmlns:a16="http://schemas.microsoft.com/office/drawing/2014/main" id="{ED531525-3AE5-B8A1-E5D6-388884C80482}"/>
               </a:ext>
             </a:extLst>
           </p:cNvPr>
@@ -696,7 +697,7 @@
           <p:cNvPr id="6" name="灯片编号占位符 5">
             <a:extLst>
               <a:ext uri="{FF2B5EF4-FFF2-40B4-BE49-F238E27FC236}">
-                <a16:creationId xmlns:a16="http://schemas.microsoft.com/office/drawing/2014/main" id="{06E99F90-9AC1-6C72-3E82-46F5D817E048}"/>
+                <a16:creationId xmlns:a16="http://schemas.microsoft.com/office/drawing/2014/main" id="{5975BE75-DA30-265C-9A4B-31A306BDEAF9}"/>
               </a:ext>
             </a:extLst>
           </p:cNvPr>
@@ -712,7 +713,7 @@
           <a:bodyPr/>
           <a:lstStyle/>
           <a:p>
-            <a:fld id="{D995F71A-2D9B-4CF0-ABE3-ED1EFFEA286C}" type="slidenum">
+            <a:fld id="{52A29C07-568E-49A1-AC9F-C6570502985A}" type="slidenum">
               <a:rPr lang="zh-CN" altLang="en-US" smtClean="0"/>
               <a:t>‹#›</a:t>
             </a:fld>
@@ -723,7 +724,7 @@
     </p:spTree>
     <p:extLst>
       <p:ext uri="{BB962C8B-B14F-4D97-AF65-F5344CB8AC3E}">
-        <p14:creationId xmlns:p14="http://schemas.microsoft.com/office/powerpoint/2010/main" val="3942731040"/>
+        <p14:creationId xmlns:p14="http://schemas.microsoft.com/office/powerpoint/2010/main" val="2867417635"/>
       </p:ext>
     </p:extLst>
   </p:cSld>
@@ -755,7 +756,7 @@
           <p:cNvPr id="2" name="标题 1">
             <a:extLst>
               <a:ext uri="{FF2B5EF4-FFF2-40B4-BE49-F238E27FC236}">
-                <a16:creationId xmlns:a16="http://schemas.microsoft.com/office/drawing/2014/main" id="{0785E6DB-54CE-F514-EEC7-9B83C1E81396}"/>
+                <a16:creationId xmlns:a16="http://schemas.microsoft.com/office/drawing/2014/main" id="{F5DCD07F-C098-D34A-E1C3-834B35FFFC80}"/>
               </a:ext>
             </a:extLst>
           </p:cNvPr>
@@ -783,7 +784,7 @@
           <p:cNvPr id="3" name="内容占位符 2">
             <a:extLst>
               <a:ext uri="{FF2B5EF4-FFF2-40B4-BE49-F238E27FC236}">
-                <a16:creationId xmlns:a16="http://schemas.microsoft.com/office/drawing/2014/main" id="{6094EE1D-12E4-660C-A442-F4F0021206F9}"/>
+                <a16:creationId xmlns:a16="http://schemas.microsoft.com/office/drawing/2014/main" id="{9A6723BA-B412-8600-7D37-DEFDA8C971B4}"/>
               </a:ext>
             </a:extLst>
           </p:cNvPr>
@@ -840,7 +841,7 @@
           <p:cNvPr id="4" name="日期占位符 3">
             <a:extLst>
               <a:ext uri="{FF2B5EF4-FFF2-40B4-BE49-F238E27FC236}">
-                <a16:creationId xmlns:a16="http://schemas.microsoft.com/office/drawing/2014/main" id="{CF795B98-776F-071F-62A8-AF7496CC3C08}"/>
+                <a16:creationId xmlns:a16="http://schemas.microsoft.com/office/drawing/2014/main" id="{5E192D43-3A27-F187-3AEF-AB3BAD5847D0}"/>
               </a:ext>
             </a:extLst>
           </p:cNvPr>
@@ -856,7 +857,7 @@
           <a:bodyPr/>
           <a:lstStyle/>
           <a:p>
-            <a:fld id="{00757A7C-17FE-42DB-BA1E-6E3DF2AE92B7}" type="datetimeFigureOut">
+            <a:fld id="{9A54E586-D7B1-4A7F-949B-0F458C3FAFDF}" type="datetimeFigureOut">
               <a:rPr lang="zh-CN" altLang="en-US" smtClean="0"/>
               <a:t>2026/10/13</a:t>
             </a:fld>
@@ -869,7 +870,7 @@
           <p:cNvPr id="5" name="页脚占位符 4">
             <a:extLst>
               <a:ext uri="{FF2B5EF4-FFF2-40B4-BE49-F238E27FC236}">
-                <a16:creationId xmlns:a16="http://schemas.microsoft.com/office/drawing/2014/main" id="{5A68E60B-58B7-E74D-AC82-2D1DE0D74F03}"/>
+                <a16:creationId xmlns:a16="http://schemas.microsoft.com/office/drawing/2014/main" id="{E0B50004-EADD-559C-5518-DEB0108B1ACD}"/>
               </a:ext>
             </a:extLst>
           </p:cNvPr>
@@ -894,7 +895,7 @@
           <p:cNvPr id="6" name="灯片编号占位符 5">
             <a:extLst>
               <a:ext uri="{FF2B5EF4-FFF2-40B4-BE49-F238E27FC236}">
-                <a16:creationId xmlns:a16="http://schemas.microsoft.com/office/drawing/2014/main" id="{C718F9D2-B3BD-5691-5BB2-33FF2EF46199}"/>
+                <a16:creationId xmlns:a16="http://schemas.microsoft.com/office/drawing/2014/main" id="{2B30D929-F0E9-AEC3-5887-B00DB8BDD971}"/>
               </a:ext>
             </a:extLst>
           </p:cNvPr>
@@ -910,7 +911,7 @@
           <a:bodyPr/>
           <a:lstStyle/>
           <a:p>
-            <a:fld id="{D995F71A-2D9B-4CF0-ABE3-ED1EFFEA286C}" type="slidenum">
+            <a:fld id="{52A29C07-568E-49A1-AC9F-C6570502985A}" type="slidenum">
               <a:rPr lang="zh-CN" altLang="en-US" smtClean="0"/>
               <a:t>‹#›</a:t>
             </a:fld>
@@ -921,7 +922,7 @@
     </p:spTree>
     <p:extLst>
       <p:ext uri="{BB962C8B-B14F-4D97-AF65-F5344CB8AC3E}">
-        <p14:creationId xmlns:p14="http://schemas.microsoft.com/office/powerpoint/2010/main" val="4022281272"/>
+        <p14:creationId xmlns:p14="http://schemas.microsoft.com/office/powerpoint/2010/main" val="1479129930"/>
       </p:ext>
     </p:extLst>
   </p:cSld>
@@ -953,7 +954,7 @@
           <p:cNvPr id="2" name="标题 1">
             <a:extLst>
               <a:ext uri="{FF2B5EF4-FFF2-40B4-BE49-F238E27FC236}">
-                <a16:creationId xmlns:a16="http://schemas.microsoft.com/office/drawing/2014/main" id="{58AD40DE-3D94-AE67-1C4A-D5076F79B8A1}"/>
+                <a16:creationId xmlns:a16="http://schemas.microsoft.com/office/drawing/2014/main" id="{C937EEFE-DADC-7450-6535-38D6C76A172A}"/>
               </a:ext>
             </a:extLst>
           </p:cNvPr>
@@ -990,7 +991,7 @@
           <p:cNvPr id="3" name="文本占位符 2">
             <a:extLst>
               <a:ext uri="{FF2B5EF4-FFF2-40B4-BE49-F238E27FC236}">
-                <a16:creationId xmlns:a16="http://schemas.microsoft.com/office/drawing/2014/main" id="{5E02DB17-D592-BE68-1481-9765DC41A2B5}"/>
+                <a16:creationId xmlns:a16="http://schemas.microsoft.com/office/drawing/2014/main" id="{37AED748-B69A-DB89-348E-FD7CC9E10624}"/>
               </a:ext>
             </a:extLst>
           </p:cNvPr>
@@ -1115,7 +1116,7 @@
           <p:cNvPr id="4" name="日期占位符 3">
             <a:extLst>
               <a:ext uri="{FF2B5EF4-FFF2-40B4-BE49-F238E27FC236}">
-                <a16:creationId xmlns:a16="http://schemas.microsoft.com/office/drawing/2014/main" id="{C0401278-AE47-FC47-7BF0-AC67769ACB11}"/>
+                <a16:creationId xmlns:a16="http://schemas.microsoft.com/office/drawing/2014/main" id="{B71C16EE-42F5-7147-9FAD-8E6CBA154197}"/>
               </a:ext>
             </a:extLst>
           </p:cNvPr>
@@ -1131,7 +1132,7 @@
           <a:bodyPr/>
           <a:lstStyle/>
           <a:p>
-            <a:fld id="{00757A7C-17FE-42DB-BA1E-6E3DF2AE92B7}" type="datetimeFigureOut">
+            <a:fld id="{9A54E586-D7B1-4A7F-949B-0F458C3FAFDF}" type="datetimeFigureOut">
               <a:rPr lang="zh-CN" altLang="en-US" smtClean="0"/>
               <a:t>2026/10/13</a:t>
             </a:fld>
@@ -1144,7 +1145,7 @@
           <p:cNvPr id="5" name="页脚占位符 4">
             <a:extLst>
               <a:ext uri="{FF2B5EF4-FFF2-40B4-BE49-F238E27FC236}">
-                <a16:creationId xmlns:a16="http://schemas.microsoft.com/office/drawing/2014/main" id="{85585C65-F7B0-F6D3-9C60-86926525D099}"/>
+                <a16:creationId xmlns:a16="http://schemas.microsoft.com/office/drawing/2014/main" id="{D15AF635-7F85-350E-5EC9-4D832373A4D3}"/>
               </a:ext>
             </a:extLst>
           </p:cNvPr>
@@ -1169,7 +1170,7 @@
           <p:cNvPr id="6" name="灯片编号占位符 5">
             <a:extLst>
               <a:ext uri="{FF2B5EF4-FFF2-40B4-BE49-F238E27FC236}">
-                <a16:creationId xmlns:a16="http://schemas.microsoft.com/office/drawing/2014/main" id="{7DF8D0E0-0393-3C95-1510-187D07FA0355}"/>
+                <a16:creationId xmlns:a16="http://schemas.microsoft.com/office/drawing/2014/main" id="{43BB212C-0378-49EE-D7A2-E197A6724934}"/>
               </a:ext>
             </a:extLst>
           </p:cNvPr>
@@ -1185,7 +1186,7 @@
           <a:bodyPr/>
           <a:lstStyle/>
           <a:p>
-            <a:fld id="{D995F71A-2D9B-4CF0-ABE3-ED1EFFEA286C}" type="slidenum">
+            <a:fld id="{52A29C07-568E-49A1-AC9F-C6570502985A}" type="slidenum">
               <a:rPr lang="zh-CN" altLang="en-US" smtClean="0"/>
               <a:t>‹#›</a:t>
             </a:fld>
@@ -1196,7 +1197,7 @@
     </p:spTree>
     <p:extLst>
       <p:ext uri="{BB962C8B-B14F-4D97-AF65-F5344CB8AC3E}">
-        <p14:creationId xmlns:p14="http://schemas.microsoft.com/office/powerpoint/2010/main" val="2383842799"/>
+        <p14:creationId xmlns:p14="http://schemas.microsoft.com/office/powerpoint/2010/main" val="3206465720"/>
       </p:ext>
     </p:extLst>
   </p:cSld>
@@ -1228,7 +1229,7 @@
           <p:cNvPr id="2" name="标题 1">
             <a:extLst>
               <a:ext uri="{FF2B5EF4-FFF2-40B4-BE49-F238E27FC236}">
-                <a16:creationId xmlns:a16="http://schemas.microsoft.com/office/drawing/2014/main" id="{E8F397F5-4E62-DEE3-5428-AA47745E1063}"/>
+                <a16:creationId xmlns:a16="http://schemas.microsoft.com/office/drawing/2014/main" id="{53431C64-B639-A879-280A-8A47D0F49B91}"/>
               </a:ext>
             </a:extLst>
           </p:cNvPr>
@@ -1256,7 +1257,7 @@
           <p:cNvPr id="3" name="内容占位符 2">
             <a:extLst>
               <a:ext uri="{FF2B5EF4-FFF2-40B4-BE49-F238E27FC236}">
-                <a16:creationId xmlns:a16="http://schemas.microsoft.com/office/drawing/2014/main" id="{FA6B96BA-349F-8AE7-0007-2AB3D7F2BAC3}"/>
+                <a16:creationId xmlns:a16="http://schemas.microsoft.com/office/drawing/2014/main" id="{7CA77365-5950-80D2-5C96-6879FE2B3EBF}"/>
               </a:ext>
             </a:extLst>
           </p:cNvPr>
@@ -1318,7 +1319,7 @@
           <p:cNvPr id="4" name="内容占位符 3">
             <a:extLst>
               <a:ext uri="{FF2B5EF4-FFF2-40B4-BE49-F238E27FC236}">
-                <a16:creationId xmlns:a16="http://schemas.microsoft.com/office/drawing/2014/main" id="{4D7C4911-8E67-869B-6808-CF49759E00E6}"/>
+                <a16:creationId xmlns:a16="http://schemas.microsoft.com/office/drawing/2014/main" id="{16119938-3DC5-CAAC-6170-A5D6851176F0}"/>
               </a:ext>
             </a:extLst>
           </p:cNvPr>
@@ -1380,7 +1381,7 @@
           <p:cNvPr id="5" name="日期占位符 4">
             <a:extLst>
               <a:ext uri="{FF2B5EF4-FFF2-40B4-BE49-F238E27FC236}">
-                <a16:creationId xmlns:a16="http://schemas.microsoft.com/office/drawing/2014/main" id="{CD1459FD-6A23-F172-3803-93DEC2DFE785}"/>
+                <a16:creationId xmlns:a16="http://schemas.microsoft.com/office/drawing/2014/main" id="{5FEA281D-34F8-172D-7D38-602416B51B02}"/>
               </a:ext>
             </a:extLst>
           </p:cNvPr>
@@ -1396,7 +1397,7 @@
           <a:bodyPr/>
           <a:lstStyle/>
           <a:p>
-            <a:fld id="{00757A7C-17FE-42DB-BA1E-6E3DF2AE92B7}" type="datetimeFigureOut">
+            <a:fld id="{9A54E586-D7B1-4A7F-949B-0F458C3FAFDF}" type="datetimeFigureOut">
               <a:rPr lang="zh-CN" altLang="en-US" smtClean="0"/>
               <a:t>2026/10/13</a:t>
             </a:fld>
@@ -1409,7 +1410,7 @@
           <p:cNvPr id="6" name="页脚占位符 5">
             <a:extLst>
               <a:ext uri="{FF2B5EF4-FFF2-40B4-BE49-F238E27FC236}">
-                <a16:creationId xmlns:a16="http://schemas.microsoft.com/office/drawing/2014/main" id="{EF32FA0B-9BCE-F6AD-8F07-82AC28F484BB}"/>
+                <a16:creationId xmlns:a16="http://schemas.microsoft.com/office/drawing/2014/main" id="{02C3AC43-442C-93F4-367B-41C9DD20AAED}"/>
               </a:ext>
             </a:extLst>
           </p:cNvPr>
@@ -1434,7 +1435,7 @@
           <p:cNvPr id="7" name="灯片编号占位符 6">
             <a:extLst>
               <a:ext uri="{FF2B5EF4-FFF2-40B4-BE49-F238E27FC236}">
-                <a16:creationId xmlns:a16="http://schemas.microsoft.com/office/drawing/2014/main" id="{92A77E2B-C760-8694-0CD7-249B4C619FCB}"/>
+                <a16:creationId xmlns:a16="http://schemas.microsoft.com/office/drawing/2014/main" id="{1D7D9F9E-B300-F35E-4281-AB843D65E5E9}"/>
               </a:ext>
             </a:extLst>
           </p:cNvPr>
@@ -1450,7 +1451,7 @@
           <a:bodyPr/>
           <a:lstStyle/>
           <a:p>
-            <a:fld id="{D995F71A-2D9B-4CF0-ABE3-ED1EFFEA286C}" type="slidenum">
+            <a:fld id="{52A29C07-568E-49A1-AC9F-C6570502985A}" type="slidenum">
               <a:rPr lang="zh-CN" altLang="en-US" smtClean="0"/>
               <a:t>‹#›</a:t>
             </a:fld>
@@ -1461,7 +1462,7 @@
     </p:spTree>
     <p:extLst>
       <p:ext uri="{BB962C8B-B14F-4D97-AF65-F5344CB8AC3E}">
-        <p14:creationId xmlns:p14="http://schemas.microsoft.com/office/powerpoint/2010/main" val="1232539761"/>
+        <p14:creationId xmlns:p14="http://schemas.microsoft.com/office/powerpoint/2010/main" val="385066056"/>
       </p:ext>
     </p:extLst>
   </p:cSld>
@@ -1493,7 +1494,7 @@
           <p:cNvPr id="2" name="标题 1">
             <a:extLst>
               <a:ext uri="{FF2B5EF4-FFF2-40B4-BE49-F238E27FC236}">
-                <a16:creationId xmlns:a16="http://schemas.microsoft.com/office/drawing/2014/main" id="{145E219B-27B1-EE22-76D2-5C812E0728CB}"/>
+                <a16:creationId xmlns:a16="http://schemas.microsoft.com/office/drawing/2014/main" id="{B314190E-465D-17EC-33FB-0F6F1DDE177E}"/>
               </a:ext>
             </a:extLst>
           </p:cNvPr>
@@ -1526,7 +1527,7 @@
           <p:cNvPr id="3" name="文本占位符 2">
             <a:extLst>
               <a:ext uri="{FF2B5EF4-FFF2-40B4-BE49-F238E27FC236}">
-                <a16:creationId xmlns:a16="http://schemas.microsoft.com/office/drawing/2014/main" id="{5E730C70-951B-E453-5FE8-141F80BE7190}"/>
+                <a16:creationId xmlns:a16="http://schemas.microsoft.com/office/drawing/2014/main" id="{36C2060C-C2A6-7346-61B5-3CBAF3798503}"/>
               </a:ext>
             </a:extLst>
           </p:cNvPr>
@@ -1597,7 +1598,7 @@
           <p:cNvPr id="4" name="内容占位符 3">
             <a:extLst>
               <a:ext uri="{FF2B5EF4-FFF2-40B4-BE49-F238E27FC236}">
-                <a16:creationId xmlns:a16="http://schemas.microsoft.com/office/drawing/2014/main" id="{E076BE7E-4006-411D-5C0B-A8EAEF4898B2}"/>
+                <a16:creationId xmlns:a16="http://schemas.microsoft.com/office/drawing/2014/main" id="{73A0E2C7-698D-4E25-1E28-F2B2B1845669}"/>
               </a:ext>
             </a:extLst>
           </p:cNvPr>
@@ -1659,7 +1660,7 @@
           <p:cNvPr id="5" name="文本占位符 4">
             <a:extLst>
               <a:ext uri="{FF2B5EF4-FFF2-40B4-BE49-F238E27FC236}">
-                <a16:creationId xmlns:a16="http://schemas.microsoft.com/office/drawing/2014/main" id="{9347C22C-C04C-67C9-EBFA-1ACE4E2A9A53}"/>
+                <a16:creationId xmlns:a16="http://schemas.microsoft.com/office/drawing/2014/main" id="{A8F965FC-483F-BF61-F891-869D78ECA8BF}"/>
               </a:ext>
             </a:extLst>
           </p:cNvPr>
@@ -1730,7 +1731,7 @@
           <p:cNvPr id="6" name="内容占位符 5">
             <a:extLst>
               <a:ext uri="{FF2B5EF4-FFF2-40B4-BE49-F238E27FC236}">
-                <a16:creationId xmlns:a16="http://schemas.microsoft.com/office/drawing/2014/main" id="{8640F1F8-A089-B993-4A34-E82B0BC073A4}"/>
+                <a16:creationId xmlns:a16="http://schemas.microsoft.com/office/drawing/2014/main" id="{A2E05900-C09E-7E40-244E-E5D704FF06AC}"/>
               </a:ext>
             </a:extLst>
           </p:cNvPr>
@@ -1792,7 +1793,7 @@
           <p:cNvPr id="7" name="日期占位符 6">
             <a:extLst>
               <a:ext uri="{FF2B5EF4-FFF2-40B4-BE49-F238E27FC236}">
-                <a16:creationId xmlns:a16="http://schemas.microsoft.com/office/drawing/2014/main" id="{56284703-6504-8309-EEA6-132C29B3DF53}"/>
+                <a16:creationId xmlns:a16="http://schemas.microsoft.com/office/drawing/2014/main" id="{B1DE929A-DDE9-BEBC-B255-B652CE5C46A9}"/>
               </a:ext>
             </a:extLst>
           </p:cNvPr>
@@ -1808,7 +1809,7 @@
           <a:bodyPr/>
           <a:lstStyle/>
           <a:p>
-            <a:fld id="{00757A7C-17FE-42DB-BA1E-6E3DF2AE92B7}" type="datetimeFigureOut">
+            <a:fld id="{9A54E586-D7B1-4A7F-949B-0F458C3FAFDF}" type="datetimeFigureOut">
               <a:rPr lang="zh-CN" altLang="en-US" smtClean="0"/>
               <a:t>2026/10/13</a:t>
             </a:fld>
@@ -1821,7 +1822,7 @@
           <p:cNvPr id="8" name="页脚占位符 7">
             <a:extLst>
               <a:ext uri="{FF2B5EF4-FFF2-40B4-BE49-F238E27FC236}">
-                <a16:creationId xmlns:a16="http://schemas.microsoft.com/office/drawing/2014/main" id="{C4EB9171-9DF8-83E9-0BA8-02F7894E2CC4}"/>
+                <a16:creationId xmlns:a16="http://schemas.microsoft.com/office/drawing/2014/main" id="{1F6EF44E-12A7-A0DE-B2CA-F5527CD99006}"/>
               </a:ext>
             </a:extLst>
           </p:cNvPr>
@@ -1846,7 +1847,7 @@
           <p:cNvPr id="9" name="灯片编号占位符 8">
             <a:extLst>
               <a:ext uri="{FF2B5EF4-FFF2-40B4-BE49-F238E27FC236}">
-                <a16:creationId xmlns:a16="http://schemas.microsoft.com/office/drawing/2014/main" id="{BE3B3321-AC29-2E2D-AA1D-8F122843C6DE}"/>
+                <a16:creationId xmlns:a16="http://schemas.microsoft.com/office/drawing/2014/main" id="{5F3DED84-32ED-7146-5618-AC9E26C9A560}"/>
               </a:ext>
             </a:extLst>
           </p:cNvPr>
@@ -1862,7 +1863,7 @@
           <a:bodyPr/>
           <a:lstStyle/>
           <a:p>
-            <a:fld id="{D995F71A-2D9B-4CF0-ABE3-ED1EFFEA286C}" type="slidenum">
+            <a:fld id="{52A29C07-568E-49A1-AC9F-C6570502985A}" type="slidenum">
               <a:rPr lang="zh-CN" altLang="en-US" smtClean="0"/>
               <a:t>‹#›</a:t>
             </a:fld>
@@ -1873,7 +1874,7 @@
     </p:spTree>
     <p:extLst>
       <p:ext uri="{BB962C8B-B14F-4D97-AF65-F5344CB8AC3E}">
-        <p14:creationId xmlns:p14="http://schemas.microsoft.com/office/powerpoint/2010/main" val="1813822423"/>
+        <p14:creationId xmlns:p14="http://schemas.microsoft.com/office/powerpoint/2010/main" val="2971879011"/>
       </p:ext>
     </p:extLst>
   </p:cSld>
@@ -1905,7 +1906,7 @@
           <p:cNvPr id="2" name="标题 1">
             <a:extLst>
               <a:ext uri="{FF2B5EF4-FFF2-40B4-BE49-F238E27FC236}">
-                <a16:creationId xmlns:a16="http://schemas.microsoft.com/office/drawing/2014/main" id="{9F1E0A51-1AE3-A880-FD98-EC24C1415B7D}"/>
+                <a16:creationId xmlns:a16="http://schemas.microsoft.com/office/drawing/2014/main" id="{9431D12C-31FD-A85B-2FA6-CB60E0752B40}"/>
               </a:ext>
             </a:extLst>
           </p:cNvPr>
@@ -1933,7 +1934,7 @@
           <p:cNvPr id="3" name="日期占位符 2">
             <a:extLst>
               <a:ext uri="{FF2B5EF4-FFF2-40B4-BE49-F238E27FC236}">
-                <a16:creationId xmlns:a16="http://schemas.microsoft.com/office/drawing/2014/main" id="{CB0E6BA6-0CE9-C1AC-3952-4E1C5101BD93}"/>
+                <a16:creationId xmlns:a16="http://schemas.microsoft.com/office/drawing/2014/main" id="{91213DB0-DF5E-9D72-6A26-E9125D5A1D40}"/>
               </a:ext>
             </a:extLst>
           </p:cNvPr>
@@ -1949,7 +1950,7 @@
           <a:bodyPr/>
           <a:lstStyle/>
           <a:p>
-            <a:fld id="{00757A7C-17FE-42DB-BA1E-6E3DF2AE92B7}" type="datetimeFigureOut">
+            <a:fld id="{9A54E586-D7B1-4A7F-949B-0F458C3FAFDF}" type="datetimeFigureOut">
               <a:rPr lang="zh-CN" altLang="en-US" smtClean="0"/>
               <a:t>2026/10/13</a:t>
             </a:fld>
@@ -1962,7 +1963,7 @@
           <p:cNvPr id="4" name="页脚占位符 3">
             <a:extLst>
               <a:ext uri="{FF2B5EF4-FFF2-40B4-BE49-F238E27FC236}">
-                <a16:creationId xmlns:a16="http://schemas.microsoft.com/office/drawing/2014/main" id="{5E03A20F-2733-693F-AA2B-8BC4360D2B62}"/>
+                <a16:creationId xmlns:a16="http://schemas.microsoft.com/office/drawing/2014/main" id="{6A5F6C05-5165-F953-990D-6C4C151D4E79}"/>
               </a:ext>
             </a:extLst>
           </p:cNvPr>
@@ -1987,7 +1988,7 @@
           <p:cNvPr id="5" name="灯片编号占位符 4">
             <a:extLst>
               <a:ext uri="{FF2B5EF4-FFF2-40B4-BE49-F238E27FC236}">
-                <a16:creationId xmlns:a16="http://schemas.microsoft.com/office/drawing/2014/main" id="{E71B7795-55AC-AC76-3EA4-655FD3808B82}"/>
+                <a16:creationId xmlns:a16="http://schemas.microsoft.com/office/drawing/2014/main" id="{53E71F0F-D13C-DF39-C566-CE43F440BFA4}"/>
               </a:ext>
             </a:extLst>
           </p:cNvPr>
@@ -2003,7 +2004,7 @@
           <a:bodyPr/>
           <a:lstStyle/>
           <a:p>
-            <a:fld id="{D995F71A-2D9B-4CF0-ABE3-ED1EFFEA286C}" type="slidenum">
+            <a:fld id="{52A29C07-568E-49A1-AC9F-C6570502985A}" type="slidenum">
               <a:rPr lang="zh-CN" altLang="en-US" smtClean="0"/>
               <a:t>‹#›</a:t>
             </a:fld>
@@ -2014,7 +2015,7 @@
     </p:spTree>
     <p:extLst>
       <p:ext uri="{BB962C8B-B14F-4D97-AF65-F5344CB8AC3E}">
-        <p14:creationId xmlns:p14="http://schemas.microsoft.com/office/powerpoint/2010/main" val="1719514266"/>
+        <p14:creationId xmlns:p14="http://schemas.microsoft.com/office/powerpoint/2010/main" val="2690588578"/>
       </p:ext>
     </p:extLst>
   </p:cSld>
@@ -2046,7 +2047,7 @@
           <p:cNvPr id="2" name="日期占位符 1">
             <a:extLst>
               <a:ext uri="{FF2B5EF4-FFF2-40B4-BE49-F238E27FC236}">
-                <a16:creationId xmlns:a16="http://schemas.microsoft.com/office/drawing/2014/main" id="{139ED6E6-B6B9-35CF-B89F-0E283FC7604E}"/>
+                <a16:creationId xmlns:a16="http://schemas.microsoft.com/office/drawing/2014/main" id="{F43B6C04-F001-E834-DF5F-94777C567132}"/>
               </a:ext>
             </a:extLst>
           </p:cNvPr>
@@ -2062,7 +2063,7 @@
           <a:bodyPr/>
           <a:lstStyle/>
           <a:p>
-            <a:fld id="{00757A7C-17FE-42DB-BA1E-6E3DF2AE92B7}" type="datetimeFigureOut">
+            <a:fld id="{9A54E586-D7B1-4A7F-949B-0F458C3FAFDF}" type="datetimeFigureOut">
               <a:rPr lang="zh-CN" altLang="en-US" smtClean="0"/>
               <a:t>2026/10/13</a:t>
             </a:fld>
@@ -2075,7 +2076,7 @@
           <p:cNvPr id="3" name="页脚占位符 2">
             <a:extLst>
               <a:ext uri="{FF2B5EF4-FFF2-40B4-BE49-F238E27FC236}">
-                <a16:creationId xmlns:a16="http://schemas.microsoft.com/office/drawing/2014/main" id="{C699E03D-DD05-8C78-683F-5144C1B65A65}"/>
+                <a16:creationId xmlns:a16="http://schemas.microsoft.com/office/drawing/2014/main" id="{70FAF0C0-6C54-2CFB-52AB-3292FC5881DE}"/>
               </a:ext>
             </a:extLst>
           </p:cNvPr>
@@ -2100,7 +2101,7 @@
           <p:cNvPr id="4" name="灯片编号占位符 3">
             <a:extLst>
               <a:ext uri="{FF2B5EF4-FFF2-40B4-BE49-F238E27FC236}">
-                <a16:creationId xmlns:a16="http://schemas.microsoft.com/office/drawing/2014/main" id="{3D7A24C9-BA67-0C68-2782-AE1E4EFD6BA7}"/>
+                <a16:creationId xmlns:a16="http://schemas.microsoft.com/office/drawing/2014/main" id="{915F0A53-8833-316C-D197-E5431CE43650}"/>
               </a:ext>
             </a:extLst>
           </p:cNvPr>
@@ -2116,7 +2117,7 @@
           <a:bodyPr/>
           <a:lstStyle/>
           <a:p>
-            <a:fld id="{D995F71A-2D9B-4CF0-ABE3-ED1EFFEA286C}" type="slidenum">
+            <a:fld id="{52A29C07-568E-49A1-AC9F-C6570502985A}" type="slidenum">
               <a:rPr lang="zh-CN" altLang="en-US" smtClean="0"/>
               <a:t>‹#›</a:t>
             </a:fld>
@@ -2127,7 +2128,7 @@
     </p:spTree>
     <p:extLst>
       <p:ext uri="{BB962C8B-B14F-4D97-AF65-F5344CB8AC3E}">
-        <p14:creationId xmlns:p14="http://schemas.microsoft.com/office/powerpoint/2010/main" val="909540798"/>
+        <p14:creationId xmlns:p14="http://schemas.microsoft.com/office/powerpoint/2010/main" val="2951145572"/>
       </p:ext>
     </p:extLst>
   </p:cSld>
@@ -2159,7 +2160,7 @@
           <p:cNvPr id="2" name="标题 1">
             <a:extLst>
               <a:ext uri="{FF2B5EF4-FFF2-40B4-BE49-F238E27FC236}">
-                <a16:creationId xmlns:a16="http://schemas.microsoft.com/office/drawing/2014/main" id="{EDA0B277-14C5-A3B7-3686-807638890333}"/>
+                <a16:creationId xmlns:a16="http://schemas.microsoft.com/office/drawing/2014/main" id="{2A1000EC-5FDC-F96D-10D9-19D580024747}"/>
               </a:ext>
             </a:extLst>
           </p:cNvPr>
@@ -2196,7 +2197,7 @@
           <p:cNvPr id="3" name="内容占位符 2">
             <a:extLst>
               <a:ext uri="{FF2B5EF4-FFF2-40B4-BE49-F238E27FC236}">
-                <a16:creationId xmlns:a16="http://schemas.microsoft.com/office/drawing/2014/main" id="{FF0889B6-1C1C-948F-DA8A-402F7E139730}"/>
+                <a16:creationId xmlns:a16="http://schemas.microsoft.com/office/drawing/2014/main" id="{67F32561-1443-C45B-675E-4ECFB206F226}"/>
               </a:ext>
             </a:extLst>
           </p:cNvPr>
@@ -2286,7 +2287,7 @@
           <p:cNvPr id="4" name="文本占位符 3">
             <a:extLst>
               <a:ext uri="{FF2B5EF4-FFF2-40B4-BE49-F238E27FC236}">
-                <a16:creationId xmlns:a16="http://schemas.microsoft.com/office/drawing/2014/main" id="{65ABC8FD-E1F4-B1B7-FDC2-702B37F111E5}"/>
+                <a16:creationId xmlns:a16="http://schemas.microsoft.com/office/drawing/2014/main" id="{FD2DC092-CDFD-76D7-87DA-E56598446426}"/>
               </a:ext>
             </a:extLst>
           </p:cNvPr>
@@ -2357,7 +2358,7 @@
           <p:cNvPr id="5" name="日期占位符 4">
             <a:extLst>
               <a:ext uri="{FF2B5EF4-FFF2-40B4-BE49-F238E27FC236}">
-                <a16:creationId xmlns:a16="http://schemas.microsoft.com/office/drawing/2014/main" id="{1F403B9D-BE41-D1D4-081C-C64DB65C2AC0}"/>
+                <a16:creationId xmlns:a16="http://schemas.microsoft.com/office/drawing/2014/main" id="{DBA67E1B-EF16-713D-A52E-82704087AC1B}"/>
               </a:ext>
             </a:extLst>
           </p:cNvPr>
@@ -2373,7 +2374,7 @@
           <a:bodyPr/>
           <a:lstStyle/>
           <a:p>
-            <a:fld id="{00757A7C-17FE-42DB-BA1E-6E3DF2AE92B7}" type="datetimeFigureOut">
+            <a:fld id="{9A54E586-D7B1-4A7F-949B-0F458C3FAFDF}" type="datetimeFigureOut">
               <a:rPr lang="zh-CN" altLang="en-US" smtClean="0"/>
               <a:t>2026/10/13</a:t>
             </a:fld>
@@ -2386,7 +2387,7 @@
           <p:cNvPr id="6" name="页脚占位符 5">
             <a:extLst>
               <a:ext uri="{FF2B5EF4-FFF2-40B4-BE49-F238E27FC236}">
-                <a16:creationId xmlns:a16="http://schemas.microsoft.com/office/drawing/2014/main" id="{C6B828AA-20BA-5AE1-7FB4-67841D7AC1F5}"/>
+                <a16:creationId xmlns:a16="http://schemas.microsoft.com/office/drawing/2014/main" id="{8583C547-679C-B5A3-48A9-ED53377B6B4E}"/>
               </a:ext>
             </a:extLst>
           </p:cNvPr>
@@ -2411,7 +2412,7 @@
           <p:cNvPr id="7" name="灯片编号占位符 6">
             <a:extLst>
               <a:ext uri="{FF2B5EF4-FFF2-40B4-BE49-F238E27FC236}">
-                <a16:creationId xmlns:a16="http://schemas.microsoft.com/office/drawing/2014/main" id="{F66992D7-9457-D276-F10C-A574C59D5051}"/>
+                <a16:creationId xmlns:a16="http://schemas.microsoft.com/office/drawing/2014/main" id="{4F9C9A6A-B7A2-6427-EE3D-7FAF3C0F49A7}"/>
               </a:ext>
             </a:extLst>
           </p:cNvPr>
@@ -2427,7 +2428,7 @@
           <a:bodyPr/>
           <a:lstStyle/>
           <a:p>
-            <a:fld id="{D995F71A-2D9B-4CF0-ABE3-ED1EFFEA286C}" type="slidenum">
+            <a:fld id="{52A29C07-568E-49A1-AC9F-C6570502985A}" type="slidenum">
               <a:rPr lang="zh-CN" altLang="en-US" smtClean="0"/>
               <a:t>‹#›</a:t>
             </a:fld>
@@ -2438,7 +2439,7 @@
     </p:spTree>
     <p:extLst>
       <p:ext uri="{BB962C8B-B14F-4D97-AF65-F5344CB8AC3E}">
-        <p14:creationId xmlns:p14="http://schemas.microsoft.com/office/powerpoint/2010/main" val="3441705287"/>
+        <p14:creationId xmlns:p14="http://schemas.microsoft.com/office/powerpoint/2010/main" val="1363997851"/>
       </p:ext>
     </p:extLst>
   </p:cSld>
@@ -2470,7 +2471,7 @@
           <p:cNvPr id="2" name="标题 1">
             <a:extLst>
               <a:ext uri="{FF2B5EF4-FFF2-40B4-BE49-F238E27FC236}">
-                <a16:creationId xmlns:a16="http://schemas.microsoft.com/office/drawing/2014/main" id="{D835DFD4-5A20-BADA-07E1-8F891745CFFC}"/>
+                <a16:creationId xmlns:a16="http://schemas.microsoft.com/office/drawing/2014/main" id="{85864A3E-D86E-F352-A579-E3A860295B60}"/>
               </a:ext>
             </a:extLst>
           </p:cNvPr>
@@ -2507,7 +2508,7 @@
           <p:cNvPr id="3" name="图片占位符 2">
             <a:extLst>
               <a:ext uri="{FF2B5EF4-FFF2-40B4-BE49-F238E27FC236}">
-                <a16:creationId xmlns:a16="http://schemas.microsoft.com/office/drawing/2014/main" id="{3448C4AA-97B4-26C1-ED21-887B9D9EB27B}"/>
+                <a16:creationId xmlns:a16="http://schemas.microsoft.com/office/drawing/2014/main" id="{9C360216-C51F-73A4-573D-5138924A25CA}"/>
               </a:ext>
             </a:extLst>
           </p:cNvPr>
@@ -2574,7 +2575,7 @@
           <p:cNvPr id="4" name="文本占位符 3">
             <a:extLst>
               <a:ext uri="{FF2B5EF4-FFF2-40B4-BE49-F238E27FC236}">
-                <a16:creationId xmlns:a16="http://schemas.microsoft.com/office/drawing/2014/main" id="{1ADB7AE7-94B9-87A0-3DD9-153E168DA2D5}"/>
+                <a16:creationId xmlns:a16="http://schemas.microsoft.com/office/drawing/2014/main" id="{F90ECA6F-150B-4735-5E62-6ECC45528FF2}"/>
               </a:ext>
             </a:extLst>
           </p:cNvPr>
@@ -2645,7 +2646,7 @@
           <p:cNvPr id="5" name="日期占位符 4">
             <a:extLst>
               <a:ext uri="{FF2B5EF4-FFF2-40B4-BE49-F238E27FC236}">
-                <a16:creationId xmlns:a16="http://schemas.microsoft.com/office/drawing/2014/main" id="{1DAB7BC0-91D7-115C-9FC1-BFBBD278AB41}"/>
+                <a16:creationId xmlns:a16="http://schemas.microsoft.com/office/drawing/2014/main" id="{EEF1F721-C849-B56F-C3C0-321E7ABDEB7F}"/>
               </a:ext>
             </a:extLst>
           </p:cNvPr>
@@ -2661,7 +2662,7 @@
           <a:bodyPr/>
           <a:lstStyle/>
           <a:p>
-            <a:fld id="{00757A7C-17FE-42DB-BA1E-6E3DF2AE92B7}" type="datetimeFigureOut">
+            <a:fld id="{9A54E586-D7B1-4A7F-949B-0F458C3FAFDF}" type="datetimeFigureOut">
               <a:rPr lang="zh-CN" altLang="en-US" smtClean="0"/>
               <a:t>2026/10/13</a:t>
             </a:fld>
@@ -2674,7 +2675,7 @@
           <p:cNvPr id="6" name="页脚占位符 5">
             <a:extLst>
               <a:ext uri="{FF2B5EF4-FFF2-40B4-BE49-F238E27FC236}">
-                <a16:creationId xmlns:a16="http://schemas.microsoft.com/office/drawing/2014/main" id="{5AFF454B-4597-176E-4245-5FDB2CBF767F}"/>
+                <a16:creationId xmlns:a16="http://schemas.microsoft.com/office/drawing/2014/main" id="{43E0629E-E776-83B9-6B34-E9A44DBFC795}"/>
               </a:ext>
             </a:extLst>
           </p:cNvPr>
@@ -2699,7 +2700,7 @@
           <p:cNvPr id="7" name="灯片编号占位符 6">
             <a:extLst>
               <a:ext uri="{FF2B5EF4-FFF2-40B4-BE49-F238E27FC236}">
-                <a16:creationId xmlns:a16="http://schemas.microsoft.com/office/drawing/2014/main" id="{B13B8338-5754-81BC-AC9D-3DD3982A2965}"/>
+                <a16:creationId xmlns:a16="http://schemas.microsoft.com/office/drawing/2014/main" id="{FFB722C3-EF41-26DE-0372-97F896B8C5CF}"/>
               </a:ext>
             </a:extLst>
           </p:cNvPr>
@@ -2715,7 +2716,7 @@
           <a:bodyPr/>
           <a:lstStyle/>
           <a:p>
-            <a:fld id="{D995F71A-2D9B-4CF0-ABE3-ED1EFFEA286C}" type="slidenum">
+            <a:fld id="{52A29C07-568E-49A1-AC9F-C6570502985A}" type="slidenum">
               <a:rPr lang="zh-CN" altLang="en-US" smtClean="0"/>
               <a:t>‹#›</a:t>
             </a:fld>
@@ -2726,7 +2727,7 @@
     </p:spTree>
     <p:extLst>
       <p:ext uri="{BB962C8B-B14F-4D97-AF65-F5344CB8AC3E}">
-        <p14:creationId xmlns:p14="http://schemas.microsoft.com/office/powerpoint/2010/main" val="1185198892"/>
+        <p14:creationId xmlns:p14="http://schemas.microsoft.com/office/powerpoint/2010/main" val="2917803187"/>
       </p:ext>
     </p:extLst>
   </p:cSld>
@@ -2763,7 +2764,7 @@
           <p:cNvPr id="2" name="标题占位符 1">
             <a:extLst>
               <a:ext uri="{FF2B5EF4-FFF2-40B4-BE49-F238E27FC236}">
-                <a16:creationId xmlns:a16="http://schemas.microsoft.com/office/drawing/2014/main" id="{3FD42856-A4C6-AAA0-A6D2-B4A01F873A2B}"/>
+                <a16:creationId xmlns:a16="http://schemas.microsoft.com/office/drawing/2014/main" id="{D97DFED4-8733-52B3-48C5-17EAAA038E99}"/>
               </a:ext>
             </a:extLst>
           </p:cNvPr>
@@ -2801,7 +2802,7 @@
           <p:cNvPr id="3" name="文本占位符 2">
             <a:extLst>
               <a:ext uri="{FF2B5EF4-FFF2-40B4-BE49-F238E27FC236}">
-                <a16:creationId xmlns:a16="http://schemas.microsoft.com/office/drawing/2014/main" id="{4929ADA4-6E67-C8E7-CFCE-B5EDA4484D42}"/>
+                <a16:creationId xmlns:a16="http://schemas.microsoft.com/office/drawing/2014/main" id="{A0F90862-3385-B223-D63F-5D6C54FB7161}"/>
               </a:ext>
             </a:extLst>
           </p:cNvPr>
@@ -2868,7 +2869,7 @@
           <p:cNvPr id="4" name="日期占位符 3">
             <a:extLst>
               <a:ext uri="{FF2B5EF4-FFF2-40B4-BE49-F238E27FC236}">
-                <a16:creationId xmlns:a16="http://schemas.microsoft.com/office/drawing/2014/main" id="{EB841BE4-FE29-76E5-CD16-38425CDA2160}"/>
+                <a16:creationId xmlns:a16="http://schemas.microsoft.com/office/drawing/2014/main" id="{E2741655-26B3-51D1-327A-7716F40A0DC8}"/>
               </a:ext>
             </a:extLst>
           </p:cNvPr>
@@ -2902,7 +2903,7 @@
             </a:lvl1pPr>
           </a:lstStyle>
           <a:p>
-            <a:fld id="{00757A7C-17FE-42DB-BA1E-6E3DF2AE92B7}" type="datetimeFigureOut">
+            <a:fld id="{9A54E586-D7B1-4A7F-949B-0F458C3FAFDF}" type="datetimeFigureOut">
               <a:rPr lang="zh-CN" altLang="en-US" smtClean="0"/>
               <a:t>2026/10/13</a:t>
             </a:fld>
@@ -2915,7 +2916,7 @@
           <p:cNvPr id="5" name="页脚占位符 4">
             <a:extLst>
               <a:ext uri="{FF2B5EF4-FFF2-40B4-BE49-F238E27FC236}">
-                <a16:creationId xmlns:a16="http://schemas.microsoft.com/office/drawing/2014/main" id="{2F89542B-0A01-FCF2-A212-BD43890D86E6}"/>
+                <a16:creationId xmlns:a16="http://schemas.microsoft.com/office/drawing/2014/main" id="{A206286B-F3E3-CD01-37AD-66B003703E15}"/>
               </a:ext>
             </a:extLst>
           </p:cNvPr>
@@ -2958,7 +2959,7 @@
           <p:cNvPr id="6" name="灯片编号占位符 5">
             <a:extLst>
               <a:ext uri="{FF2B5EF4-FFF2-40B4-BE49-F238E27FC236}">
-                <a16:creationId xmlns:a16="http://schemas.microsoft.com/office/drawing/2014/main" id="{7F952404-5D45-7AAE-28AD-64F0F584E45E}"/>
+                <a16:creationId xmlns:a16="http://schemas.microsoft.com/office/drawing/2014/main" id="{03B6EEFD-A620-993F-A7E4-F2503D55F170}"/>
               </a:ext>
             </a:extLst>
           </p:cNvPr>
@@ -2992,7 +2993,7 @@
             </a:lvl1pPr>
           </a:lstStyle>
           <a:p>
-            <a:fld id="{D995F71A-2D9B-4CF0-ABE3-ED1EFFEA286C}" type="slidenum">
+            <a:fld id="{52A29C07-568E-49A1-AC9F-C6570502985A}" type="slidenum">
               <a:rPr lang="zh-CN" altLang="en-US" smtClean="0"/>
               <a:t>‹#›</a:t>
             </a:fld>
@@ -3003,7 +3004,7 @@
     </p:spTree>
     <p:extLst>
       <p:ext uri="{BB962C8B-B14F-4D97-AF65-F5344CB8AC3E}">
-        <p14:creationId xmlns:p14="http://schemas.microsoft.com/office/powerpoint/2010/main" val="3793721646"/>
+        <p14:creationId xmlns:p14="http://schemas.microsoft.com/office/powerpoint/2010/main" val="4162260584"/>
       </p:ext>
     </p:extLst>
   </p:cSld>
@@ -3326,7 +3327,7 @@
           <p:cNvPr id="2" name="矩形 1">
             <a:extLst>
               <a:ext uri="{FF2B5EF4-FFF2-40B4-BE49-F238E27FC236}">
-                <a16:creationId xmlns:a16="http://schemas.microsoft.com/office/drawing/2014/main" id="{9793E30D-6396-4FA8-1E90-FECC9677E8DE}"/>
+                <a16:creationId xmlns:a16="http://schemas.microsoft.com/office/drawing/2014/main" id="{B5CB6E22-8FA3-7982-EBE6-631B4E063A05}"/>
               </a:ext>
             </a:extLst>
           </p:cNvPr>
@@ -3401,7 +3402,7 @@
           <p:cNvPr id="3" name="矩形 2">
             <a:extLst>
               <a:ext uri="{FF2B5EF4-FFF2-40B4-BE49-F238E27FC236}">
-                <a16:creationId xmlns:a16="http://schemas.microsoft.com/office/drawing/2014/main" id="{5BE90EA0-1EE8-344F-A7ED-F997CC90F419}"/>
+                <a16:creationId xmlns:a16="http://schemas.microsoft.com/office/drawing/2014/main" id="{612C6DCD-51E6-D87D-9290-703AFC58716D}"/>
               </a:ext>
             </a:extLst>
           </p:cNvPr>
@@ -3476,7 +3477,7 @@
           <p:cNvPr id="4" name="矩形 3">
             <a:extLst>
               <a:ext uri="{FF2B5EF4-FFF2-40B4-BE49-F238E27FC236}">
-                <a16:creationId xmlns:a16="http://schemas.microsoft.com/office/drawing/2014/main" id="{B015B61F-FD1D-5D42-00FD-CDB4ACFB4C56}"/>
+                <a16:creationId xmlns:a16="http://schemas.microsoft.com/office/drawing/2014/main" id="{F0537E67-E327-BC77-9E29-F8FA5EDEC86C}"/>
               </a:ext>
             </a:extLst>
           </p:cNvPr>
@@ -3551,7 +3552,7 @@
           <p:cNvPr id="5" name="矩形 4">
             <a:extLst>
               <a:ext uri="{FF2B5EF4-FFF2-40B4-BE49-F238E27FC236}">
-                <a16:creationId xmlns:a16="http://schemas.microsoft.com/office/drawing/2014/main" id="{AFE6FC8F-7BE1-CA17-075B-BAB2E5FD835F}"/>
+                <a16:creationId xmlns:a16="http://schemas.microsoft.com/office/drawing/2014/main" id="{977A8920-AE5E-3A27-F628-963B07AAC608}"/>
               </a:ext>
             </a:extLst>
           </p:cNvPr>
@@ -3626,7 +3627,7 @@
           <p:cNvPr id="6" name="矩形 5">
             <a:extLst>
               <a:ext uri="{FF2B5EF4-FFF2-40B4-BE49-F238E27FC236}">
-                <a16:creationId xmlns:a16="http://schemas.microsoft.com/office/drawing/2014/main" id="{CBD2103C-AA12-96F7-D59B-483A9AEF6CD0}"/>
+                <a16:creationId xmlns:a16="http://schemas.microsoft.com/office/drawing/2014/main" id="{CA230211-B982-A9F4-DED4-52B231355CD3}"/>
               </a:ext>
             </a:extLst>
           </p:cNvPr>
@@ -3701,7 +3702,7 @@
           <p:cNvPr id="7" name="矩形 6">
             <a:extLst>
               <a:ext uri="{FF2B5EF4-FFF2-40B4-BE49-F238E27FC236}">
-                <a16:creationId xmlns:a16="http://schemas.microsoft.com/office/drawing/2014/main" id="{8E31E02E-46E8-2281-CE45-EB36AE04F90B}"/>
+                <a16:creationId xmlns:a16="http://schemas.microsoft.com/office/drawing/2014/main" id="{B5896786-EBD9-5D5A-4130-44F9C5545785}"/>
               </a:ext>
             </a:extLst>
           </p:cNvPr>
@@ -3776,7 +3777,7 @@
           <p:cNvPr id="8" name="矩形 7">
             <a:extLst>
               <a:ext uri="{FF2B5EF4-FFF2-40B4-BE49-F238E27FC236}">
-                <a16:creationId xmlns:a16="http://schemas.microsoft.com/office/drawing/2014/main" id="{8B1456D3-A858-77D0-2A3E-504A72BBBB48}"/>
+                <a16:creationId xmlns:a16="http://schemas.microsoft.com/office/drawing/2014/main" id="{E4D3147E-A0AD-E33F-D738-8BDAA3FEBCAF}"/>
               </a:ext>
             </a:extLst>
           </p:cNvPr>
@@ -3851,7 +3852,7 @@
           <p:cNvPr id="9" name="矩形 8">
             <a:extLst>
               <a:ext uri="{FF2B5EF4-FFF2-40B4-BE49-F238E27FC236}">
-                <a16:creationId xmlns:a16="http://schemas.microsoft.com/office/drawing/2014/main" id="{D635BA1C-6A4A-0D58-6D35-AA2A49E91692}"/>
+                <a16:creationId xmlns:a16="http://schemas.microsoft.com/office/drawing/2014/main" id="{C2F0218C-4D49-86F5-E9D1-1405A1E8CE04}"/>
               </a:ext>
             </a:extLst>
           </p:cNvPr>
@@ -3926,7 +3927,7 @@
           <p:cNvPr id="10" name="矩形 9">
             <a:extLst>
               <a:ext uri="{FF2B5EF4-FFF2-40B4-BE49-F238E27FC236}">
-                <a16:creationId xmlns:a16="http://schemas.microsoft.com/office/drawing/2014/main" id="{16DC9B33-E06D-B22C-7012-56C17DB531AE}"/>
+                <a16:creationId xmlns:a16="http://schemas.microsoft.com/office/drawing/2014/main" id="{0FFA050F-0893-254D-21A7-F8ACD563FCA1}"/>
               </a:ext>
             </a:extLst>
           </p:cNvPr>
@@ -4001,7 +4002,7 @@
           <p:cNvPr id="11" name="矩形 10">
             <a:extLst>
               <a:ext uri="{FF2B5EF4-FFF2-40B4-BE49-F238E27FC236}">
-                <a16:creationId xmlns:a16="http://schemas.microsoft.com/office/drawing/2014/main" id="{AFB280D9-ACED-F465-1E3D-437AB7BF96E6}"/>
+                <a16:creationId xmlns:a16="http://schemas.microsoft.com/office/drawing/2014/main" id="{DEDA446C-830E-4C69-9F0F-D3EF51F0D2C2}"/>
               </a:ext>
             </a:extLst>
           </p:cNvPr>
@@ -4074,7 +4075,232 @@
     </p:spTree>
     <p:extLst>
       <p:ext uri="{BB962C8B-B14F-4D97-AF65-F5344CB8AC3E}">
-        <p14:creationId xmlns:p14="http://schemas.microsoft.com/office/powerpoint/2010/main" val="4188222848"/>
+        <p14:creationId xmlns:p14="http://schemas.microsoft.com/office/powerpoint/2010/main" val="2250008450"/>
+      </p:ext>
+    </p:extLst>
+  </p:cSld>
+  <p:clrMapOvr>
+    <a:masterClrMapping/>
+  </p:clrMapOvr>
+</p:sld>
+</file>
+
+<file path=ppt/slides/slide2.xml><?xml version="1.0" encoding="utf-8"?>
+<p:sld xmlns:a="http://schemas.openxmlformats.org/drawingml/2006/main" xmlns:r="http://schemas.openxmlformats.org/officeDocument/2006/relationships" xmlns:p="http://schemas.openxmlformats.org/presentationml/2006/main">
+  <p:cSld>
+    <p:spTree>
+      <p:nvGrpSpPr>
+        <p:cNvPr id="1" name=""/>
+        <p:cNvGrpSpPr/>
+        <p:nvPr/>
+      </p:nvGrpSpPr>
+      <p:grpSpPr>
+        <a:xfrm>
+          <a:off x="0" y="0"/>
+          <a:ext cx="0" cy="0"/>
+          <a:chOff x="0" y="0"/>
+          <a:chExt cx="0" cy="0"/>
+        </a:xfrm>
+      </p:grpSpPr>
+      <p:sp>
+        <p:nvSpPr>
+          <p:cNvPr id="2" name="文本框 1">
+            <a:extLst>
+              <a:ext uri="{FF2B5EF4-FFF2-40B4-BE49-F238E27FC236}">
+                <a16:creationId xmlns:a16="http://schemas.microsoft.com/office/drawing/2014/main" id="{27D92644-B798-0BE9-521A-30C880253EDC}"/>
+              </a:ext>
+            </a:extLst>
+          </p:cNvPr>
+          <p:cNvSpPr txBox="1"/>
+          <p:nvPr/>
+        </p:nvSpPr>
+        <p:spPr>
+          <a:xfrm>
+            <a:off x="508000" y="381000"/>
+            <a:ext cx="11176000" cy="1200329"/>
+          </a:xfrm>
+          <a:prstGeom prst="rect">
+            <a:avLst/>
+          </a:prstGeom>
+          <a:noFill/>
+        </p:spPr>
+        <p:txBody>
+          <a:bodyPr vert="horz" rtlCol="0">
+            <a:spAutoFit/>
+            <a:scene3d>
+              <a:camera prst="orthographicFront"/>
+              <a:lightRig rig="threePt" dir="t"/>
+            </a:scene3d>
+            <a:sp3d>
+              <a:bevelT/>
+            </a:sp3d>
+          </a:bodyPr>
+          <a:lstStyle/>
+          <a:p>
+            <a:r>
+              <a:rPr lang="zh-CN" altLang="en-US" sz="7200" b="1">
+                <a:solidFill>
+                  <a:srgbClr val="C00000"/>
+                </a:solidFill>
+                <a:latin typeface="Arial" panose="020B0604020202020204" pitchFamily="34" charset="0"/>
+                <a:ea typeface="Microsoft YaHei" panose="020B0503020204020204" pitchFamily="34" charset="-122"/>
+              </a:rPr>
+              <a:t>三维文字 </a:t>
+            </a:r>
+            <a:r>
+              <a:rPr lang="en-US" altLang="zh-CN" sz="7200" b="1">
+                <a:solidFill>
+                  <a:srgbClr val="C00000"/>
+                </a:solidFill>
+                <a:latin typeface="Arial" panose="020B0604020202020204" pitchFamily="34" charset="0"/>
+                <a:ea typeface="Microsoft YaHei" panose="020B0503020204020204" pitchFamily="34" charset="-122"/>
+              </a:rPr>
+              <a:t>Bevel 3D</a:t>
+            </a:r>
+            <a:endParaRPr lang="zh-CN" altLang="en-US" sz="7200" b="1">
+              <a:solidFill>
+                <a:srgbClr val="C00000"/>
+              </a:solidFill>
+              <a:latin typeface="Arial" panose="020B0604020202020204" pitchFamily="34" charset="0"/>
+              <a:ea typeface="Microsoft YaHei" panose="020B0503020204020204" pitchFamily="34" charset="-122"/>
+            </a:endParaRPr>
+          </a:p>
+        </p:txBody>
+      </p:sp>
+      <p:sp>
+        <p:nvSpPr>
+          <p:cNvPr id="3" name="文本框 2">
+            <a:extLst>
+              <a:ext uri="{FF2B5EF4-FFF2-40B4-BE49-F238E27FC236}">
+                <a16:creationId xmlns:a16="http://schemas.microsoft.com/office/drawing/2014/main" id="{013ABC5D-B108-20B8-7A30-B9CE5193018D}"/>
+              </a:ext>
+            </a:extLst>
+          </p:cNvPr>
+          <p:cNvSpPr txBox="1"/>
+          <p:nvPr/>
+        </p:nvSpPr>
+        <p:spPr>
+          <a:xfrm>
+            <a:off x="508000" y="2413000"/>
+            <a:ext cx="11176000" cy="1200329"/>
+          </a:xfrm>
+          <a:prstGeom prst="rect">
+            <a:avLst/>
+          </a:prstGeom>
+          <a:noFill/>
+        </p:spPr>
+        <p:txBody>
+          <a:bodyPr vert="horz" rtlCol="0">
+            <a:spAutoFit/>
+            <a:scene3d>
+              <a:camera prst="orthographicFront"/>
+              <a:lightRig rig="threePt" dir="t"/>
+            </a:scene3d>
+            <a:sp3d>
+              <a:bevelT/>
+            </a:sp3d>
+          </a:bodyPr>
+          <a:lstStyle/>
+          <a:p>
+            <a:r>
+              <a:rPr lang="zh-CN" altLang="en-US" sz="7200" b="1">
+                <a:solidFill>
+                  <a:srgbClr val="0070C0"/>
+                </a:solidFill>
+                <a:latin typeface="Arial" panose="020B0604020202020204" pitchFamily="34" charset="0"/>
+                <a:ea typeface="Microsoft YaHei" panose="020B0503020204020204" pitchFamily="34" charset="-122"/>
+              </a:rPr>
+              <a:t>三维文字 </a:t>
+            </a:r>
+            <a:r>
+              <a:rPr lang="en-US" altLang="zh-CN" sz="7200" b="1">
+                <a:solidFill>
+                  <a:srgbClr val="0070C0"/>
+                </a:solidFill>
+                <a:latin typeface="Arial" panose="020B0604020202020204" pitchFamily="34" charset="0"/>
+                <a:ea typeface="Microsoft YaHei" panose="020B0503020204020204" pitchFamily="34" charset="-122"/>
+              </a:rPr>
+              <a:t>Bevel 3D</a:t>
+            </a:r>
+            <a:endParaRPr lang="zh-CN" altLang="en-US" sz="7200" b="1">
+              <a:solidFill>
+                <a:srgbClr val="0070C0"/>
+              </a:solidFill>
+              <a:latin typeface="Arial" panose="020B0604020202020204" pitchFamily="34" charset="0"/>
+              <a:ea typeface="Microsoft YaHei" panose="020B0503020204020204" pitchFamily="34" charset="-122"/>
+            </a:endParaRPr>
+          </a:p>
+        </p:txBody>
+      </p:sp>
+      <p:sp>
+        <p:nvSpPr>
+          <p:cNvPr id="4" name="文本框 3">
+            <a:extLst>
+              <a:ext uri="{FF2B5EF4-FFF2-40B4-BE49-F238E27FC236}">
+                <a16:creationId xmlns:a16="http://schemas.microsoft.com/office/drawing/2014/main" id="{0631CE90-C155-3859-F764-F1E3971A636E}"/>
+              </a:ext>
+            </a:extLst>
+          </p:cNvPr>
+          <p:cNvSpPr txBox="1"/>
+          <p:nvPr/>
+        </p:nvSpPr>
+        <p:spPr>
+          <a:xfrm>
+            <a:off x="508000" y="4445000"/>
+            <a:ext cx="11176000" cy="1200329"/>
+          </a:xfrm>
+          <a:prstGeom prst="rect">
+            <a:avLst/>
+          </a:prstGeom>
+          <a:noFill/>
+        </p:spPr>
+        <p:txBody>
+          <a:bodyPr vert="horz" rtlCol="0">
+            <a:spAutoFit/>
+            <a:scene3d>
+              <a:camera prst="orthographicFront"/>
+              <a:lightRig rig="threePt" dir="t"/>
+            </a:scene3d>
+            <a:sp3d>
+              <a:bevelT/>
+            </a:sp3d>
+          </a:bodyPr>
+          <a:lstStyle/>
+          <a:p>
+            <a:r>
+              <a:rPr lang="zh-CN" altLang="en-US" sz="7200" b="1">
+                <a:solidFill>
+                  <a:srgbClr val="808080"/>
+                </a:solidFill>
+                <a:latin typeface="Arial" panose="020B0604020202020204" pitchFamily="34" charset="0"/>
+                <a:ea typeface="Microsoft YaHei" panose="020B0503020204020204" pitchFamily="34" charset="-122"/>
+              </a:rPr>
+              <a:t>三维文字 </a:t>
+            </a:r>
+            <a:r>
+              <a:rPr lang="en-US" altLang="zh-CN" sz="7200" b="1">
+                <a:solidFill>
+                  <a:srgbClr val="808080"/>
+                </a:solidFill>
+                <a:latin typeface="Arial" panose="020B0604020202020204" pitchFamily="34" charset="0"/>
+                <a:ea typeface="Microsoft YaHei" panose="020B0503020204020204" pitchFamily="34" charset="-122"/>
+              </a:rPr>
+              <a:t>Bevel 3D</a:t>
+            </a:r>
+            <a:endParaRPr lang="zh-CN" altLang="en-US" sz="7200" b="1">
+              <a:solidFill>
+                <a:srgbClr val="808080"/>
+              </a:solidFill>
+              <a:latin typeface="Arial" panose="020B0604020202020204" pitchFamily="34" charset="0"/>
+              <a:ea typeface="Microsoft YaHei" panose="020B0503020204020204" pitchFamily="34" charset="-122"/>
+            </a:endParaRPr>
+          </a:p>
+        </p:txBody>
+      </p:sp>
+    </p:spTree>
+    <p:extLst>
+      <p:ext uri="{BB962C8B-B14F-4D97-AF65-F5344CB8AC3E}">
+        <p14:creationId xmlns:p14="http://schemas.microsoft.com/office/powerpoint/2010/main" val="566471327"/>
       </p:ext>
     </p:extLst>
   </p:cSld>
